--- a/docs/CS4412_Joshua_Vach_Slides.pptx
+++ b/docs/CS4412_Joshua_Vach_Slides.pptx
@@ -394,6 +394,13 @@
             <a:schemeClr val="lt1"/>
           </a:fontRef>
         </p:style>
+        <p:txBody>
+          <a:bodyPr/>
+          <a:lstStyle/>
+          <a:p>
+            <a:endParaRPr lang="en-US"/>
+          </a:p>
+        </p:txBody>
       </p:sp>
       <p:sp>
         <p:nvSpPr>
@@ -442,6 +449,13 @@
             <a:schemeClr val="lt1"/>
           </a:fontRef>
         </p:style>
+        <p:txBody>
+          <a:bodyPr/>
+          <a:lstStyle/>
+          <a:p>
+            <a:endParaRPr lang="en-US"/>
+          </a:p>
+        </p:txBody>
       </p:sp>
     </p:spTree>
     <p:extLst>
@@ -932,6 +946,13 @@
             <a:schemeClr val="lt1"/>
           </a:fontRef>
         </p:style>
+        <p:txBody>
+          <a:bodyPr/>
+          <a:lstStyle/>
+          <a:p>
+            <a:endParaRPr lang="en-US"/>
+          </a:p>
+        </p:txBody>
       </p:sp>
       <p:sp useBgFill="1">
         <p:nvSpPr>
@@ -974,6 +995,13 @@
             <a:schemeClr val="lt1"/>
           </a:fontRef>
         </p:style>
+        <p:txBody>
+          <a:bodyPr/>
+          <a:lstStyle/>
+          <a:p>
+            <a:endParaRPr lang="en-US"/>
+          </a:p>
+        </p:txBody>
       </p:sp>
       <p:sp>
         <p:nvSpPr>
@@ -1018,6 +1046,13 @@
             <a:schemeClr val="lt1"/>
           </a:fontRef>
         </p:style>
+        <p:txBody>
+          <a:bodyPr/>
+          <a:lstStyle/>
+          <a:p>
+            <a:endParaRPr lang="en-US"/>
+          </a:p>
+        </p:txBody>
       </p:sp>
       <p:sp>
         <p:nvSpPr>
@@ -4899,19 +4934,22 @@
             </a:r>
             <a:r>
               <a:rPr lang="en-US" dirty="0"/>
-              <a:t> over 100,000 video games with data about their publisher, platform, release year, and sales in various regions.</a:t>
-            </a:r>
-          </a:p>
-          <a:p>
-            <a:r>
-              <a:rPr lang="en-US" dirty="0"/>
-              <a:t>Analysis will focus on trends based on sales within va</a:t>
+              <a:t> </a:t>
             </a:r>
             <a:r>
               <a:rPr lang="en-US"/>
-              <a:t>rious regions and how different variables will affect them.</a:t>
-            </a:r>
-            <a:endParaRPr lang="en-US" dirty="0"/>
+              <a:t>over 16,000 </a:t>
+            </a:r>
+            <a:r>
+              <a:rPr lang="en-US" dirty="0"/>
+              <a:t>video games with data about their publisher, platform, release year, and sales in various regions.</a:t>
+            </a:r>
+          </a:p>
+          <a:p>
+            <a:r>
+              <a:rPr lang="en-US" dirty="0"/>
+              <a:t>Analysis will focus on trends based on sales within various regions and how different variables will affect them.</a:t>
+            </a:r>
           </a:p>
         </p:txBody>
       </p:sp>
@@ -4937,6 +4975,7 @@
           <a:lstStyle/>
           <a:p>
             <a:fld id="{4147CCFB-68F0-4BDE-87FE-0AFC9699E9EF}" type="datetime1">
+              <a:rPr/>
               <a:t>4/25/2026</a:t>
             </a:fld>
             <a:endParaRPr lang="en-US" dirty="0"/>

--- a/docs/CS4412_Joshua_Vach_Slides.pptx
+++ b/docs/CS4412_Joshua_Vach_Slides.pptx
@@ -286,7 +286,7 @@
           <a:p>
             <a:fld id="{965A7A7B-B71A-428D-833F-0F3507A6DB13}" type="datetimeFigureOut">
               <a:rPr lang="en-US" dirty="0"/>
-              <a:t>4/25/2026</a:t>
+              <a:t>4/28/2026</a:t>
             </a:fld>
             <a:endParaRPr lang="en-US" dirty="0"/>
           </a:p>
@@ -595,7 +595,7 @@
           <a:p>
             <a:fld id="{F248F9EB-9D34-4B41-B66C-5FAF50876D2D}" type="datetimeFigureOut">
               <a:rPr lang="en-US" dirty="0"/>
-              <a:t>4/25/2026</a:t>
+              <a:t>4/28/2026</a:t>
             </a:fld>
             <a:endParaRPr lang="en-US" dirty="0"/>
           </a:p>
@@ -803,7 +803,7 @@
           <a:p>
             <a:fld id="{34489A26-CAA1-4690-8C1F-1641B1B97745}" type="datetimeFigureOut">
               <a:rPr lang="en-US" dirty="0"/>
-              <a:t>4/25/2026</a:t>
+              <a:t>4/28/2026</a:t>
             </a:fld>
             <a:endParaRPr lang="en-US" dirty="0"/>
           </a:p>
@@ -1183,7 +1183,7 @@
           <a:p>
             <a:fld id="{5CF65307-640F-4AE7-B0BE-50C709AD86C5}" type="datetimeFigureOut">
               <a:rPr lang="en-US" dirty="0"/>
-              <a:t>4/25/2026</a:t>
+              <a:t>4/28/2026</a:t>
             </a:fld>
             <a:endParaRPr lang="en-US" dirty="0"/>
           </a:p>
@@ -1563,7 +1563,7 @@
           <a:p>
             <a:fld id="{F77EA1F9-1F0F-4C65-8F6E-9729B924AAAC}" type="datetimeFigureOut">
               <a:rPr lang="en-US" dirty="0"/>
-              <a:t>4/25/2026</a:t>
+              <a:t>4/28/2026</a:t>
             </a:fld>
             <a:endParaRPr lang="en-US" dirty="0"/>
           </a:p>
@@ -1984,7 +1984,7 @@
           <a:p>
             <a:fld id="{202278E8-5F4B-47D5-A617-8CCDF75D6A33}" type="datetimeFigureOut">
               <a:rPr lang="en-US" dirty="0"/>
-              <a:t>4/25/2026</a:t>
+              <a:t>4/28/2026</a:t>
             </a:fld>
             <a:endParaRPr lang="en-US" dirty="0"/>
           </a:p>
@@ -2572,7 +2572,7 @@
           <a:p>
             <a:fld id="{16AAFA52-7A21-407F-8339-40DF182D7460}" type="datetimeFigureOut">
               <a:rPr lang="en-US" dirty="0"/>
-              <a:t>4/25/2026</a:t>
+              <a:t>4/28/2026</a:t>
             </a:fld>
             <a:endParaRPr lang="en-US" dirty="0"/>
           </a:p>
@@ -2827,7 +2827,7 @@
           <a:p>
             <a:fld id="{96770335-1C1A-4243-9BDD-9630C417D284}" type="datetimeFigureOut">
               <a:rPr lang="en-US" dirty="0"/>
-              <a:t>4/25/2026</a:t>
+              <a:t>4/28/2026</a:t>
             </a:fld>
             <a:endParaRPr lang="en-US" dirty="0"/>
           </a:p>
@@ -2940,7 +2940,7 @@
           <a:p>
             <a:fld id="{0141513F-8EBD-4612-96F4-CC3E309609AF}" type="datetimeFigureOut">
               <a:rPr lang="en-US" dirty="0"/>
-              <a:t>4/25/2026</a:t>
+              <a:t>4/28/2026</a:t>
             </a:fld>
             <a:endParaRPr lang="en-US" dirty="0"/>
           </a:p>
@@ -3361,7 +3361,7 @@
           <a:p>
             <a:fld id="{6E6483A1-31A8-47A2-AB0A-53A7803D5EBF}" type="datetimeFigureOut">
               <a:rPr lang="en-US" dirty="0"/>
-              <a:t>4/25/2026</a:t>
+              <a:t>4/28/2026</a:t>
             </a:fld>
             <a:endParaRPr lang="en-US" dirty="0"/>
           </a:p>
@@ -3761,7 +3761,7 @@
           <a:p>
             <a:fld id="{6D8810B9-2C7C-4CAF-99E2-617AE20BA331}" type="datetimeFigureOut">
               <a:rPr lang="en-US" dirty="0"/>
-              <a:t>4/25/2026</a:t>
+              <a:t>4/28/2026</a:t>
             </a:fld>
             <a:endParaRPr lang="en-US" dirty="0"/>
           </a:p>
@@ -4002,7 +4002,7 @@
           <a:p>
             <a:fld id="{37E93E0A-5177-400C-87C9-C93AF466EC49}" type="datetimeFigureOut">
               <a:rPr lang="en-US" dirty="0"/>
-              <a:t>4/25/2026</a:t>
+              <a:t>4/28/2026</a:t>
             </a:fld>
             <a:endParaRPr lang="en-US" dirty="0"/>
           </a:p>
@@ -4592,7 +4592,7 @@
           <a:lstStyle/>
           <a:p>
             <a:fld id="{5A6A8D64-92A5-4298-AA6E-2B4A0EFEEF4C}" type="datetime1">
-              <a:t>4/25/2026</a:t>
+              <a:t>4/28/2026</a:t>
             </a:fld>
             <a:endParaRPr lang="en-US" dirty="0"/>
           </a:p>
@@ -4783,7 +4783,7 @@
           <a:lstStyle/>
           <a:p>
             <a:fld id="{B4B4A8FE-10FC-43B4-9916-028AAAD173AE}" type="datetime1">
-              <a:t>4/25/2026</a:t>
+              <a:t>4/28/2026</a:t>
             </a:fld>
             <a:endParaRPr lang="en-US" dirty="0"/>
           </a:p>
@@ -4975,8 +4975,8 @@
           <a:lstStyle/>
           <a:p>
             <a:fld id="{4147CCFB-68F0-4BDE-87FE-0AFC9699E9EF}" type="datetime1">
-              <a:rPr/>
-              <a:t>4/25/2026</a:t>
+              <a:rPr lang="en-US"/>
+              <a:t>4/28/2026</a:t>
             </a:fld>
             <a:endParaRPr lang="en-US" dirty="0"/>
           </a:p>
@@ -5223,7 +5223,7 @@
           <a:lstStyle/>
           <a:p>
             <a:fld id="{3F6ED993-88EA-4867-98B1-EC3DE5A9CE26}" type="datetime1">
-              <a:t>4/25/2026</a:t>
+              <a:t>4/28/2026</a:t>
             </a:fld>
             <a:endParaRPr lang="en-US" dirty="0"/>
           </a:p>
@@ -5428,7 +5428,7 @@
           <a:lstStyle/>
           <a:p>
             <a:fld id="{17E1C3F0-DBEF-4B4F-8766-AC9F9854D987}" type="datetime1">
-              <a:t>4/25/2026</a:t>
+              <a:t>4/28/2026</a:t>
             </a:fld>
             <a:endParaRPr lang="en-US" dirty="0"/>
           </a:p>
@@ -5609,7 +5609,7 @@
           <a:lstStyle/>
           <a:p>
             <a:fld id="{3CD8304B-73E5-4921-8016-11192D0B6A4B}" type="datetime1">
-              <a:t>4/25/2026</a:t>
+              <a:t>4/28/2026</a:t>
             </a:fld>
             <a:endParaRPr lang="en-US" dirty="0"/>
           </a:p>
@@ -5781,7 +5781,7 @@
           <a:lstStyle/>
           <a:p>
             <a:fld id="{09E0BAD7-CF13-4897-AE1F-53B3153E657A}" type="datetime1">
-              <a:t>4/25/2026</a:t>
+              <a:t>4/28/2026</a:t>
             </a:fld>
             <a:endParaRPr lang="en-US" dirty="0"/>
           </a:p>
@@ -6040,7 +6040,7 @@
           <a:p>
             <a:r>
               <a:rPr lang="en-US"/>
-              <a:t>Results: K-Means (Questions 1 and 2) </a:t>
+              <a:t>Results: K-Means (Questions 2 and 3) </a:t>
             </a:r>
           </a:p>
         </p:txBody>
@@ -6099,7 +6099,8 @@
           <a:lstStyle/>
           <a:p>
             <a:fld id="{39C0C794-B696-4048-B2F3-2B77C14550F8}" type="datetime1">
-              <a:t>4/25/2026</a:t>
+              <a:rPr lang="en-US"/>
+              <a:t>4/28/2026</a:t>
             </a:fld>
             <a:endParaRPr lang="en-US" dirty="0"/>
           </a:p>
@@ -6361,7 +6362,7 @@
           <a:lstStyle/>
           <a:p>
             <a:fld id="{1B267163-E0A0-4D73-91E2-0A626A2C29AE}" type="datetime1">
-              <a:t>4/25/2026</a:t>
+              <a:t>4/28/2026</a:t>
             </a:fld>
             <a:endParaRPr lang="en-US" dirty="0"/>
           </a:p>
@@ -6688,7 +6689,7 @@
           <a:lstStyle/>
           <a:p>
             <a:fld id="{37244BAB-BC17-4A7B-BB08-2CFA0649A578}" type="datetime1">
-              <a:t>4/25/2026</a:t>
+              <a:t>4/28/2026</a:t>
             </a:fld>
             <a:endParaRPr lang="en-US" dirty="0"/>
           </a:p>
